--- a/仕様書/勝利条件.pptx
+++ b/仕様書/勝利条件.pptx
@@ -104,6 +104,11 @@
       </a:defRPr>
     </a:lvl9pPr>
   </p:defaultTextStyle>
+  <p:extLst>
+    <p:ext uri="{EFAFB233-063F-42B5-8137-9DF3F51BA10A}">
+      <p15:sldGuideLst xmlns:p15="http://schemas.microsoft.com/office/powerpoint/2012/main"/>
+    </p:ext>
+  </p:extLst>
 </p:presentation>
 </file>
 
@@ -112,16 +117,24 @@
   <pc:docChgLst>
     <pc:chgData name="黒沢　爽次" userId="fae486ef-0c84-45a4-a237-2d2b758b0e89" providerId="ADAL" clId="{EAF5760B-3E5F-44AE-8B3D-7D32DAA2A3B2}"/>
     <pc:docChg chg="custSel addSld modSld">
-      <pc:chgData name="黒沢　爽次" userId="fae486ef-0c84-45a4-a237-2d2b758b0e89" providerId="ADAL" clId="{EAF5760B-3E5F-44AE-8B3D-7D32DAA2A3B2}" dt="2026-06-03T03:38:59.879" v="310" actId="20577"/>
+      <pc:chgData name="黒沢　爽次" userId="fae486ef-0c84-45a4-a237-2d2b758b0e89" providerId="ADAL" clId="{EAF5760B-3E5F-44AE-8B3D-7D32DAA2A3B2}" dt="2026-06-04T00:31:27.589" v="335" actId="1076"/>
       <pc:docMkLst>
         <pc:docMk/>
       </pc:docMkLst>
       <pc:sldChg chg="addSp delSp modSp new mod">
-        <pc:chgData name="黒沢　爽次" userId="fae486ef-0c84-45a4-a237-2d2b758b0e89" providerId="ADAL" clId="{EAF5760B-3E5F-44AE-8B3D-7D32DAA2A3B2}" dt="2026-06-03T03:38:59.879" v="310" actId="20577"/>
+        <pc:chgData name="黒沢　爽次" userId="fae486ef-0c84-45a4-a237-2d2b758b0e89" providerId="ADAL" clId="{EAF5760B-3E5F-44AE-8B3D-7D32DAA2A3B2}" dt="2026-06-04T00:31:27.589" v="335" actId="1076"/>
         <pc:sldMkLst>
           <pc:docMk/>
           <pc:sldMk cId="155737" sldId="256"/>
         </pc:sldMkLst>
+        <pc:spChg chg="add mod">
+          <ac:chgData name="黒沢　爽次" userId="fae486ef-0c84-45a4-a237-2d2b758b0e89" providerId="ADAL" clId="{EAF5760B-3E5F-44AE-8B3D-7D32DAA2A3B2}" dt="2026-06-04T00:31:27.589" v="335" actId="1076"/>
+          <ac:spMkLst>
+            <pc:docMk/>
+            <pc:sldMk cId="155737" sldId="256"/>
+            <ac:spMk id="2" creationId="{A3E3E992-AA20-4877-AA68-691D3959FE5F}"/>
+          </ac:spMkLst>
+        </pc:spChg>
         <pc:spChg chg="del">
           <ac:chgData name="黒沢　爽次" userId="fae486ef-0c84-45a4-a237-2d2b758b0e89" providerId="ADAL" clId="{EAF5760B-3E5F-44AE-8B3D-7D32DAA2A3B2}" dt="2026-06-03T03:35:29.891" v="1" actId="478"/>
           <ac:spMkLst>
@@ -745,6 +758,41 @@
           </a:p>
         </p:txBody>
       </p:sp>
+      <p:sp>
+        <p:nvSpPr>
+          <p:cNvPr id="2" name="テキスト ボックス 1">
+            <a:extLst>
+              <a:ext uri="{FF2B5EF4-FFF2-40B4-BE49-F238E27FC236}">
+                <a16:creationId xmlns:a16="http://schemas.microsoft.com/office/drawing/2014/main" id="{A3E3E992-AA20-4877-AA68-691D3959FE5F}"/>
+              </a:ext>
+            </a:extLst>
+          </p:cNvPr>
+          <p:cNvSpPr txBox="1"/>
+          <p:nvPr/>
+        </p:nvSpPr>
+        <p:spPr>
+          <a:xfrm>
+            <a:off x="3325091" y="4465122"/>
+            <a:ext cx="2031325" cy="369332"/>
+          </a:xfrm>
+          <a:prstGeom prst="rect">
+            <a:avLst/>
+          </a:prstGeom>
+          <a:noFill/>
+        </p:spPr>
+        <p:txBody>
+          <a:bodyPr wrap="none" rtlCol="0">
+            <a:spAutoFit/>
+          </a:bodyPr>
+          <a:lstStyle/>
+          <a:p>
+            <a:r>
+              <a:rPr kumimoji="1" lang="ja-JP" altLang="en-US" dirty="0"/>
+              <a:t>思いつき次第追加</a:t>
+            </a:r>
+          </a:p>
+        </p:txBody>
+      </p:sp>
     </p:spTree>
     <p:extLst>
       <p:ext uri="{BB962C8B-B14F-4D97-AF65-F5344CB8AC3E}">
